--- a/Development_D1/Workshop/D1-W02_Apply_Workshop_L03-L04_The_Wellbeing_Week_Survey.pptx
+++ b/Development_D1/Workshop/D1-W02_Apply_Workshop_L03-L04_The_Wellbeing_Week_Survey.pptx
@@ -19849,7 +19849,7 @@
                 <a:latin typeface="Calibri" pitchFamily="34" charset="0"/>
                 <a:cs typeface="Amiri" pitchFamily="2" charset="-78"/>
               </a:rPr>
-              <a:t>STEP 9 · WRITE YOUR TEXT · ABOUT 70–90 WORDS</a:t>
+              <a:t>STEP 9 · WRITE YOUR TEXT · ABOUT 60–80 WORDS</a:t>
             </a:r>
             <a:endParaRPr lang="en-US" sz="1000" dirty="0"/>
           </a:p>
@@ -20101,7 +20101,7 @@
                 <a:latin typeface="Calibri" pitchFamily="34" charset="0"/>
                 <a:cs typeface="Amiri" pitchFamily="2" charset="-78"/>
               </a:rPr>
-              <a:t>Write a report (about 70–90 words) for the wellbeing week about your own habits and a partner’s. Include: • five frequency expressions • two qabla / baʿda + noun and two qabla an / baʿda an + verb • one thing you never do • a comparison with ‏</a:t>
+              <a:t>Write a report (about 60–80 words) for the wellbeing week about your own habits and a partner’s. Include: • five frequency expressions • two qabla / baʿda + noun and two qabla an / baʿda an + verb • one thing you never do • a comparison with ‏</a:t>
             </a:r>
             <a:pPr algn="l" indent="0" marL="0">
               <a:buNone/>
